--- a/10-plantas/01-steelmaking/05-capacitacion/MO-EAF-02/MO-EAF-02_Capacitacion_AMMX.pptx
+++ b/10-plantas/01-steelmaking/05-capacitacion/MO-EAF-02/MO-EAF-02_Capacitacion_AMMX.pptx
@@ -16271,7 +16271,7 @@
                           <a:ea typeface="Century Gothic" pitchFamily="34" charset="-122"/>
                           <a:cs typeface="Century Gothic" pitchFamily="34" charset="-120"/>
                         </a:rPr>
-                        <a:t>24 meses; pórtico 12</a:t>
+                        <a:t>24 meses; pórtico e izaje 12</a:t>
                       </a:r>
                       <a:endParaRPr lang="en-US" sz="950" dirty="0">
                         <a:latin typeface="Century Gothic" charset="0"/>
@@ -17297,7 +17297,7 @@
                           <a:ea typeface="Century Gothic" pitchFamily="34" charset="-122"/>
                           <a:cs typeface="Century Gothic" pitchFamily="34" charset="-120"/>
                         </a:rPr>
-                        <a:t>12 meses</a:t>
+                        <a:t>24 meses; pórtico 12</a:t>
                       </a:r>
                       <a:endParaRPr lang="en-US" sz="950" dirty="0">
                         <a:latin typeface="Century Gothic" charset="0"/>
@@ -18613,7 +18613,7 @@
                 <a:ea typeface="Century Gothic" pitchFamily="34" charset="-122"/>
                 <a:cs typeface="Century Gothic" pitchFamily="34" charset="-120"/>
               </a:rPr>
-              <a:t>24 meses; pórtico 12</a:t>
+              <a:t>24 meses; pórtico e izaje 12</a:t>
             </a:r>
             <a:endParaRPr lang="en-US" sz="900" dirty="0"/>
           </a:p>
@@ -20299,7 +20299,7 @@
                 <a:ea typeface="Calibri" pitchFamily="34" charset="-122"/>
                 <a:cs typeface="Calibri" pitchFamily="34" charset="-120"/>
               </a:rPr>
-              <a:t>Siguiente paso: OJT supervisado y evaluación práctica (TD-P07); registro en IMaS y DC-3/SIRCE. Validación: visto bueno técnica (pendientes: seguridad, laboral, diseño instruccional).</a:t>
+              <a:t>Siguiente paso: OJT supervisado y evaluación práctica (TD-P07); registro en IMaS y DC-3/SIRCE. Validación: visto bueno técnica, seguridad, laboral, diseño instruccional.</a:t>
             </a:r>
             <a:endParaRPr lang="en-US" sz="750" dirty="0"/>
           </a:p>
@@ -25716,7 +25716,7 @@
                 <a:ea typeface="Century Gothic" pitchFamily="34" charset="-122"/>
                 <a:cs typeface="Century Gothic" pitchFamily="34" charset="-120"/>
               </a:rPr>
-              <a:t>Una 2.ª canasta suma ≈ 3 min más: tap-to-tap ≈ 58 min.</a:t>
+              <a:t>Una 2.ª canasta suma ≈ 3 min de arco apagado: hay que cuidar el tap-to-tap de 55 min.</a:t>
             </a:r>
             <a:endParaRPr lang="en-US" sz="1100" dirty="0"/>
           </a:p>
